--- a/vector-legal-presentation.pptx
+++ b/vector-legal-presentation.pptx
@@ -3135,6 +3135,10 @@
             <a:noFill/>
           </a:ln>
         </p:spPr>
+        <p:txBody>
+          <a:bodyPr/>
+          <a:p/>
+        </p:txBody>
       </p:sp>
       <p:sp>
         <p:nvSpPr>
@@ -3171,6 +3175,10 @@
             <a:noFill/>
           </a:ln>
         </p:spPr>
+        <p:txBody>
+          <a:bodyPr/>
+          <a:p/>
+        </p:txBody>
       </p:sp>
       <p:sp>
         <p:nvSpPr>
@@ -3204,6 +3212,10 @@
             <a:noFill/>
           </a:ln>
         </p:spPr>
+        <p:txBody>
+          <a:bodyPr/>
+          <a:p/>
+        </p:txBody>
       </p:sp>
       <p:sp>
         <p:nvSpPr>
@@ -3237,6 +3249,10 @@
             <a:noFill/>
           </a:ln>
         </p:spPr>
+        <p:txBody>
+          <a:bodyPr/>
+          <a:p/>
+        </p:txBody>
       </p:sp>
       <p:pic>
         <p:nvPicPr>
@@ -3301,6 +3317,10 @@
               </a:solidFill>
             </a:ln>
           </p:spPr>
+          <p:txBody>
+            <a:bodyPr/>
+            <a:p/>
+          </p:txBody>
         </p:sp>
         <p:sp>
           <p:nvSpPr>
@@ -3468,6 +3488,10 @@
             <a:noFill/>
           </a:ln>
         </p:spPr>
+        <p:txBody>
+          <a:bodyPr/>
+          <a:p/>
+        </p:txBody>
       </p:sp>
       <p:grpSp>
         <p:nvGrpSpPr>
@@ -3508,6 +3532,10 @@
               </a:solidFill>
             </a:ln>
           </p:spPr>
+          <p:txBody>
+            <a:bodyPr/>
+            <a:p/>
+          </p:txBody>
         </p:sp>
         <p:sp>
           <p:nvSpPr>
@@ -3532,6 +3560,10 @@
               <a:noFill/>
             </a:ln>
           </p:spPr>
+          <p:txBody>
+            <a:bodyPr/>
+            <a:p/>
+          </p:txBody>
         </p:sp>
         <p:sp>
           <p:nvSpPr>
@@ -3653,6 +3685,10 @@
               </a:solidFill>
             </a:ln>
           </p:spPr>
+          <p:txBody>
+            <a:bodyPr/>
+            <a:p/>
+          </p:txBody>
         </p:sp>
         <p:sp>
           <p:nvSpPr>
@@ -3677,6 +3713,10 @@
               <a:noFill/>
             </a:ln>
           </p:spPr>
+          <p:txBody>
+            <a:bodyPr/>
+            <a:p/>
+          </p:txBody>
         </p:sp>
         <p:sp>
           <p:nvSpPr>
@@ -3713,7 +3753,7 @@
                   <a:ea typeface="Inter"/>
                   <a:cs typeface="Inter"/>
                 </a:rPr>
-                <a:t>167</a:t>
+                <a:t>168</a:t>
               </a:r>
             </a:p>
           </p:txBody>
@@ -3798,6 +3838,10 @@
               </a:solidFill>
             </a:ln>
           </p:spPr>
+          <p:txBody>
+            <a:bodyPr/>
+            <a:p/>
+          </p:txBody>
         </p:sp>
         <p:sp>
           <p:nvSpPr>
@@ -3822,6 +3866,10 @@
               <a:noFill/>
             </a:ln>
           </p:spPr>
+          <p:txBody>
+            <a:bodyPr/>
+            <a:p/>
+          </p:txBody>
         </p:sp>
         <p:sp>
           <p:nvSpPr>
@@ -3941,6 +3989,10 @@
               <a:noFill/>
             </a:ln>
           </p:spPr>
+          <p:txBody>
+            <a:bodyPr/>
+            <a:p/>
+          </p:txBody>
         </p:sp>
         <p:sp>
           <p:nvSpPr>
@@ -4018,7 +4070,7 @@
                 <a:ea typeface="Inter"/>
                 <a:cs typeface="Inter"/>
               </a:rPr>
-              <a:t>Адаптация из anthropics/claude-for-legal · Apache-2.0</a:t>
+              <a:t>Адаптация anthropics/claude-for-legal (Apache-2.0) · код — MIT</a:t>
             </a:r>
           </a:p>
         </p:txBody>
@@ -4120,6 +4172,10 @@
             <a:noFill/>
           </a:ln>
         </p:spPr>
+        <p:txBody>
+          <a:bodyPr/>
+          <a:p/>
+        </p:txBody>
       </p:sp>
       <p:sp>
         <p:nvSpPr>
@@ -4153,6 +4209,10 @@
             <a:noFill/>
           </a:ln>
         </p:spPr>
+        <p:txBody>
+          <a:bodyPr/>
+          <a:p/>
+        </p:txBody>
       </p:sp>
       <p:sp>
         <p:nvSpPr>
@@ -4186,6 +4246,10 @@
             <a:noFill/>
           </a:ln>
         </p:spPr>
+        <p:txBody>
+          <a:bodyPr/>
+          <a:p/>
+        </p:txBody>
       </p:sp>
       <p:sp>
         <p:nvSpPr>
@@ -4339,6 +4403,10 @@
             <a:noFill/>
           </a:ln>
         </p:spPr>
+        <p:txBody>
+          <a:bodyPr/>
+          <a:p/>
+        </p:txBody>
       </p:sp>
       <p:grpSp>
         <p:nvGrpSpPr>
@@ -4379,6 +4447,10 @@
               </a:solidFill>
             </a:ln>
           </p:spPr>
+          <p:txBody>
+            <a:bodyPr/>
+            <a:p/>
+          </p:txBody>
         </p:sp>
         <p:sp>
           <p:nvSpPr>
@@ -4403,6 +4475,10 @@
               <a:noFill/>
             </a:ln>
           </p:spPr>
+          <p:txBody>
+            <a:bodyPr/>
+            <a:p/>
+          </p:txBody>
         </p:sp>
         <p:sp>
           <p:nvSpPr>
@@ -4644,6 +4720,10 @@
               </a:solidFill>
             </a:ln>
           </p:spPr>
+          <p:txBody>
+            <a:bodyPr/>
+            <a:p/>
+          </p:txBody>
         </p:sp>
         <p:sp>
           <p:nvSpPr>
@@ -4668,6 +4748,10 @@
               <a:noFill/>
             </a:ln>
           </p:spPr>
+          <p:txBody>
+            <a:bodyPr/>
+            <a:p/>
+          </p:txBody>
         </p:sp>
         <p:sp>
           <p:nvSpPr>
@@ -4909,6 +4993,10 @@
               </a:solidFill>
             </a:ln>
           </p:spPr>
+          <p:txBody>
+            <a:bodyPr/>
+            <a:p/>
+          </p:txBody>
         </p:sp>
         <p:sp>
           <p:nvSpPr>
@@ -4933,6 +5021,10 @@
               <a:noFill/>
             </a:ln>
           </p:spPr>
+          <p:txBody>
+            <a:bodyPr/>
+            <a:p/>
+          </p:txBody>
         </p:sp>
         <p:sp>
           <p:nvSpPr>
@@ -5174,6 +5266,10 @@
               </a:solidFill>
             </a:ln>
           </p:spPr>
+          <p:txBody>
+            <a:bodyPr/>
+            <a:p/>
+          </p:txBody>
         </p:sp>
         <p:sp>
           <p:nvSpPr>
@@ -5473,6 +5569,10 @@
             <a:noFill/>
           </a:ln>
         </p:spPr>
+        <p:txBody>
+          <a:bodyPr/>
+          <a:p/>
+        </p:txBody>
       </p:sp>
       <p:sp>
         <p:nvSpPr>
@@ -5506,6 +5606,10 @@
             <a:noFill/>
           </a:ln>
         </p:spPr>
+        <p:txBody>
+          <a:bodyPr/>
+          <a:p/>
+        </p:txBody>
       </p:sp>
       <p:sp>
         <p:nvSpPr>
@@ -5539,6 +5643,10 @@
             <a:noFill/>
           </a:ln>
         </p:spPr>
+        <p:txBody>
+          <a:bodyPr/>
+          <a:p/>
+        </p:txBody>
       </p:sp>
       <p:sp>
         <p:nvSpPr>
@@ -5692,6 +5800,10 @@
             <a:noFill/>
           </a:ln>
         </p:spPr>
+        <p:txBody>
+          <a:bodyPr/>
+          <a:p/>
+        </p:txBody>
       </p:sp>
       <p:grpSp>
         <p:nvGrpSpPr>
@@ -5732,6 +5844,10 @@
               </a:solidFill>
             </a:ln>
           </p:spPr>
+          <p:txBody>
+            <a:bodyPr/>
+            <a:p/>
+          </p:txBody>
         </p:sp>
         <p:sp>
           <p:nvSpPr>
@@ -5933,6 +6049,10 @@
               </a:solidFill>
             </a:ln>
           </p:spPr>
+          <p:txBody>
+            <a:bodyPr/>
+            <a:p/>
+          </p:txBody>
         </p:sp>
         <p:sp>
           <p:nvSpPr>
@@ -6134,6 +6254,10 @@
               </a:solidFill>
             </a:ln>
           </p:spPr>
+          <p:txBody>
+            <a:bodyPr/>
+            <a:p/>
+          </p:txBody>
         </p:sp>
         <p:sp>
           <p:nvSpPr>
@@ -6313,6 +6437,10 @@
             <a:noFill/>
           </a:ln>
         </p:spPr>
+        <p:txBody>
+          <a:bodyPr/>
+          <a:p/>
+        </p:txBody>
       </p:sp>
       <p:sp>
         <p:nvSpPr>
@@ -6346,6 +6474,10 @@
             <a:noFill/>
           </a:ln>
         </p:spPr>
+        <p:txBody>
+          <a:bodyPr/>
+          <a:p/>
+        </p:txBody>
       </p:sp>
       <p:sp>
         <p:nvSpPr>
@@ -6379,6 +6511,10 @@
             <a:noFill/>
           </a:ln>
         </p:spPr>
+        <p:txBody>
+          <a:bodyPr/>
+          <a:p/>
+        </p:txBody>
       </p:sp>
       <p:sp>
         <p:nvSpPr>
@@ -6455,7 +6591,7 @@
                 <a:ea typeface="Inter"/>
                 <a:cs typeface="Inter"/>
               </a:rPr>
-              <a:t>12 плагинов · 167 навыков · адаптация claude-for-legal под право РФ</a:t>
+              <a:t>12 плагинов · 168 навыков · адаптация claude-for-legal под право РФ</a:t>
             </a:r>
           </a:p>
         </p:txBody>
@@ -6492,6 +6628,10 @@
             <a:noFill/>
           </a:ln>
         </p:spPr>
+        <p:txBody>
+          <a:bodyPr/>
+          <a:p/>
+        </p:txBody>
       </p:sp>
       <p:sp>
         <p:nvSpPr>
@@ -6568,7 +6708,7 @@
                 <a:ea typeface="Inter"/>
                 <a:cs typeface="Inter"/>
               </a:rPr>
-              <a:t>Apache-2.0 · структурная база: anthropics/claude-for-legal (Anthropic)</a:t>
+              <a:t>MIT · структурная база: anthropics/claude-for-legal (Anthropic, Apache-2.0)</a:t>
             </a:r>
           </a:p>
         </p:txBody>
@@ -6830,6 +6970,10 @@
             <a:noFill/>
           </a:ln>
         </p:spPr>
+        <p:txBody>
+          <a:bodyPr/>
+          <a:p/>
+        </p:txBody>
       </p:sp>
       <p:sp>
         <p:nvSpPr>
@@ -6863,6 +7007,10 @@
             <a:noFill/>
           </a:ln>
         </p:spPr>
+        <p:txBody>
+          <a:bodyPr/>
+          <a:p/>
+        </p:txBody>
       </p:sp>
       <p:sp>
         <p:nvSpPr>
@@ -6896,6 +7044,10 @@
             <a:noFill/>
           </a:ln>
         </p:spPr>
+        <p:txBody>
+          <a:bodyPr/>
+          <a:p/>
+        </p:txBody>
       </p:sp>
       <p:sp>
         <p:nvSpPr>
@@ -7049,6 +7201,10 @@
             <a:noFill/>
           </a:ln>
         </p:spPr>
+        <p:txBody>
+          <a:bodyPr/>
+          <a:p/>
+        </p:txBody>
       </p:sp>
       <p:sp>
         <p:nvSpPr>
@@ -7209,6 +7365,10 @@
               </a:solidFill>
             </a:ln>
           </p:spPr>
+          <p:txBody>
+            <a:bodyPr/>
+            <a:p/>
+          </p:txBody>
         </p:sp>
         <p:sp>
           <p:nvSpPr>
@@ -7410,6 +7570,10 @@
               </a:solidFill>
             </a:ln>
           </p:spPr>
+          <p:txBody>
+            <a:bodyPr/>
+            <a:p/>
+          </p:txBody>
         </p:sp>
         <p:sp>
           <p:nvSpPr>
@@ -7611,6 +7775,10 @@
               </a:solidFill>
             </a:ln>
           </p:spPr>
+          <p:txBody>
+            <a:bodyPr/>
+            <a:p/>
+          </p:txBody>
         </p:sp>
         <p:sp>
           <p:nvSpPr>
@@ -7812,6 +7980,10 @@
               </a:solidFill>
             </a:ln>
           </p:spPr>
+          <p:txBody>
+            <a:bodyPr/>
+            <a:p/>
+          </p:txBody>
         </p:sp>
         <p:sp>
           <p:nvSpPr>
@@ -7928,7 +8100,7 @@
                   <a:ea typeface="Inter"/>
                   <a:cs typeface="Inter"/>
                 </a:rPr>
-                <a:t>Адаптация (Osmosy, Apache-2.0) — русское право + Hermes Agent + расширения:</a:t>
+                <a:t>Адаптация (Osmosy, MIT) — русское право + Hermes Agent + расширения:</a:t>
               </a:r>
             </a:p>
           </p:txBody>
@@ -8071,6 +8243,10 @@
             <a:noFill/>
           </a:ln>
         </p:spPr>
+        <p:txBody>
+          <a:bodyPr/>
+          <a:p/>
+        </p:txBody>
       </p:sp>
       <p:sp>
         <p:nvSpPr>
@@ -8104,6 +8280,10 @@
             <a:noFill/>
           </a:ln>
         </p:spPr>
+        <p:txBody>
+          <a:bodyPr/>
+          <a:p/>
+        </p:txBody>
       </p:sp>
       <p:sp>
         <p:nvSpPr>
@@ -8137,6 +8317,10 @@
             <a:noFill/>
           </a:ln>
         </p:spPr>
+        <p:txBody>
+          <a:bodyPr/>
+          <a:p/>
+        </p:txBody>
       </p:sp>
       <p:sp>
         <p:nvSpPr>
@@ -8290,6 +8474,10 @@
             <a:noFill/>
           </a:ln>
         </p:spPr>
+        <p:txBody>
+          <a:bodyPr/>
+          <a:p/>
+        </p:txBody>
       </p:sp>
       <p:grpSp>
         <p:nvGrpSpPr>
@@ -8330,6 +8518,10 @@
               </a:solidFill>
             </a:ln>
           </p:spPr>
+          <p:txBody>
+            <a:bodyPr/>
+            <a:p/>
+          </p:txBody>
         </p:sp>
         <p:sp>
           <p:nvSpPr>
@@ -8354,6 +8546,10 @@
               <a:noFill/>
             </a:ln>
           </p:spPr>
+          <p:txBody>
+            <a:bodyPr/>
+            <a:p/>
+          </p:txBody>
         </p:sp>
         <p:sp>
           <p:nvSpPr>
@@ -8555,6 +8751,10 @@
               </a:solidFill>
             </a:ln>
           </p:spPr>
+          <p:txBody>
+            <a:bodyPr/>
+            <a:p/>
+          </p:txBody>
         </p:sp>
         <p:sp>
           <p:nvSpPr>
@@ -8579,6 +8779,10 @@
               <a:noFill/>
             </a:ln>
           </p:spPr>
+          <p:txBody>
+            <a:bodyPr/>
+            <a:p/>
+          </p:txBody>
         </p:sp>
         <p:sp>
           <p:nvSpPr>
@@ -8780,6 +8984,10 @@
               </a:solidFill>
             </a:ln>
           </p:spPr>
+          <p:txBody>
+            <a:bodyPr/>
+            <a:p/>
+          </p:txBody>
         </p:sp>
         <p:sp>
           <p:nvSpPr>
@@ -8804,6 +9012,10 @@
               <a:noFill/>
             </a:ln>
           </p:spPr>
+          <p:txBody>
+            <a:bodyPr/>
+            <a:p/>
+          </p:txBody>
         </p:sp>
         <p:sp>
           <p:nvSpPr>
@@ -9005,6 +9217,10 @@
               </a:solidFill>
             </a:ln>
           </p:spPr>
+          <p:txBody>
+            <a:bodyPr/>
+            <a:p/>
+          </p:txBody>
         </p:sp>
         <p:sp>
           <p:nvSpPr>
@@ -9029,6 +9245,10 @@
               <a:noFill/>
             </a:ln>
           </p:spPr>
+          <p:txBody>
+            <a:bodyPr/>
+            <a:p/>
+          </p:txBody>
         </p:sp>
         <p:sp>
           <p:nvSpPr>
@@ -9226,6 +9446,10 @@
             </a:solidFill>
           </a:ln>
         </p:spPr>
+        <p:txBody>
+          <a:bodyPr/>
+          <a:p/>
+        </p:txBody>
       </p:sp>
       <p:sp>
         <p:nvSpPr>
@@ -9262,6 +9486,10 @@
             </a:solidFill>
           </a:ln>
         </p:spPr>
+        <p:txBody>
+          <a:bodyPr/>
+          <a:p/>
+        </p:txBody>
       </p:sp>
       <p:sp>
         <p:nvSpPr>
@@ -9298,6 +9526,10 @@
             </a:solidFill>
           </a:ln>
         </p:spPr>
+        <p:txBody>
+          <a:bodyPr/>
+          <a:p/>
+        </p:txBody>
       </p:sp>
       <p:grpSp>
         <p:nvGrpSpPr>
@@ -9338,6 +9570,10 @@
               </a:solidFill>
             </a:ln>
           </p:spPr>
+          <p:txBody>
+            <a:bodyPr/>
+            <a:p/>
+          </p:txBody>
         </p:sp>
         <p:sp>
           <p:nvSpPr>
@@ -9637,6 +9873,10 @@
             <a:noFill/>
           </a:ln>
         </p:spPr>
+        <p:txBody>
+          <a:bodyPr/>
+          <a:p/>
+        </p:txBody>
       </p:sp>
       <p:sp>
         <p:nvSpPr>
@@ -9670,6 +9910,10 @@
             <a:noFill/>
           </a:ln>
         </p:spPr>
+        <p:txBody>
+          <a:bodyPr/>
+          <a:p/>
+        </p:txBody>
       </p:sp>
       <p:sp>
         <p:nvSpPr>
@@ -9703,6 +9947,10 @@
             <a:noFill/>
           </a:ln>
         </p:spPr>
+        <p:txBody>
+          <a:bodyPr/>
+          <a:p/>
+        </p:txBody>
       </p:sp>
       <p:sp>
         <p:nvSpPr>
@@ -9856,6 +10104,10 @@
             <a:noFill/>
           </a:ln>
         </p:spPr>
+        <p:txBody>
+          <a:bodyPr/>
+          <a:p/>
+        </p:txBody>
       </p:sp>
       <p:grpSp>
         <p:nvGrpSpPr>
@@ -9896,6 +10148,10 @@
               </a:solidFill>
             </a:ln>
           </p:spPr>
+          <p:txBody>
+            <a:bodyPr/>
+            <a:p/>
+          </p:txBody>
         </p:sp>
         <p:sp>
           <p:nvSpPr>
@@ -10057,6 +10313,10 @@
               </a:solidFill>
             </a:ln>
           </p:spPr>
+          <p:txBody>
+            <a:bodyPr/>
+            <a:p/>
+          </p:txBody>
         </p:sp>
         <p:sp>
           <p:nvSpPr>
@@ -10218,6 +10478,10 @@
               </a:solidFill>
             </a:ln>
           </p:spPr>
+          <p:txBody>
+            <a:bodyPr/>
+            <a:p/>
+          </p:txBody>
         </p:sp>
         <p:sp>
           <p:nvSpPr>
@@ -10379,6 +10643,10 @@
               </a:solidFill>
             </a:ln>
           </p:spPr>
+          <p:txBody>
+            <a:bodyPr/>
+            <a:p/>
+          </p:txBody>
         </p:sp>
         <p:sp>
           <p:nvSpPr>
@@ -10540,6 +10808,10 @@
               </a:solidFill>
             </a:ln>
           </p:spPr>
+          <p:txBody>
+            <a:bodyPr/>
+            <a:p/>
+          </p:txBody>
         </p:sp>
         <p:sp>
           <p:nvSpPr>
@@ -10701,6 +10973,10 @@
               </a:solidFill>
             </a:ln>
           </p:spPr>
+          <p:txBody>
+            <a:bodyPr/>
+            <a:p/>
+          </p:txBody>
         </p:sp>
         <p:sp>
           <p:nvSpPr>
@@ -10920,6 +11196,10 @@
             <a:noFill/>
           </a:ln>
         </p:spPr>
+        <p:txBody>
+          <a:bodyPr/>
+          <a:p/>
+        </p:txBody>
       </p:sp>
       <p:sp>
         <p:nvSpPr>
@@ -10953,6 +11233,10 @@
             <a:noFill/>
           </a:ln>
         </p:spPr>
+        <p:txBody>
+          <a:bodyPr/>
+          <a:p/>
+        </p:txBody>
       </p:sp>
       <p:sp>
         <p:nvSpPr>
@@ -10986,6 +11270,10 @@
             <a:noFill/>
           </a:ln>
         </p:spPr>
+        <p:txBody>
+          <a:bodyPr/>
+          <a:p/>
+        </p:txBody>
       </p:sp>
       <p:sp>
         <p:nvSpPr>
@@ -11139,6 +11427,10 @@
             <a:noFill/>
           </a:ln>
         </p:spPr>
+        <p:txBody>
+          <a:bodyPr/>
+          <a:p/>
+        </p:txBody>
       </p:sp>
       <p:grpSp>
         <p:nvGrpSpPr>
@@ -11179,6 +11471,10 @@
               </a:solidFill>
             </a:ln>
           </p:spPr>
+          <p:txBody>
+            <a:bodyPr/>
+            <a:p/>
+          </p:txBody>
         </p:sp>
         <p:sp>
           <p:nvSpPr>
@@ -11340,6 +11636,10 @@
               </a:solidFill>
             </a:ln>
           </p:spPr>
+          <p:txBody>
+            <a:bodyPr/>
+            <a:p/>
+          </p:txBody>
         </p:sp>
         <p:sp>
           <p:nvSpPr>
@@ -11501,6 +11801,10 @@
               </a:solidFill>
             </a:ln>
           </p:spPr>
+          <p:txBody>
+            <a:bodyPr/>
+            <a:p/>
+          </p:txBody>
         </p:sp>
         <p:sp>
           <p:nvSpPr>
@@ -11662,6 +11966,10 @@
               </a:solidFill>
             </a:ln>
           </p:spPr>
+          <p:txBody>
+            <a:bodyPr/>
+            <a:p/>
+          </p:txBody>
         </p:sp>
         <p:sp>
           <p:nvSpPr>
@@ -11823,6 +12131,10 @@
               </a:solidFill>
             </a:ln>
           </p:spPr>
+          <p:txBody>
+            <a:bodyPr/>
+            <a:p/>
+          </p:txBody>
         </p:sp>
         <p:sp>
           <p:nvSpPr>
@@ -11984,6 +12296,10 @@
               </a:solidFill>
             </a:ln>
           </p:spPr>
+          <p:txBody>
+            <a:bodyPr/>
+            <a:p/>
+          </p:txBody>
         </p:sp>
         <p:sp>
           <p:nvSpPr>
@@ -12129,6 +12445,10 @@
             <a:noFill/>
           </a:ln>
         </p:spPr>
+        <p:txBody>
+          <a:bodyPr/>
+          <a:p/>
+        </p:txBody>
       </p:sp>
       <p:sp>
         <p:nvSpPr>
@@ -12267,6 +12587,10 @@
             <a:noFill/>
           </a:ln>
         </p:spPr>
+        <p:txBody>
+          <a:bodyPr/>
+          <a:p/>
+        </p:txBody>
       </p:sp>
       <p:sp>
         <p:nvSpPr>
@@ -12300,6 +12624,10 @@
             <a:noFill/>
           </a:ln>
         </p:spPr>
+        <p:txBody>
+          <a:bodyPr/>
+          <a:p/>
+        </p:txBody>
       </p:sp>
       <p:sp>
         <p:nvSpPr>
@@ -12333,6 +12661,10 @@
             <a:noFill/>
           </a:ln>
         </p:spPr>
+        <p:txBody>
+          <a:bodyPr/>
+          <a:p/>
+        </p:txBody>
       </p:sp>
       <p:sp>
         <p:nvSpPr>
@@ -12486,6 +12818,10 @@
             <a:noFill/>
           </a:ln>
         </p:spPr>
+        <p:txBody>
+          <a:bodyPr/>
+          <a:p/>
+        </p:txBody>
       </p:sp>
       <p:sp>
         <p:nvSpPr>
@@ -12566,6 +12902,10 @@
               </a:solidFill>
             </a:ln>
           </p:spPr>
+          <p:txBody>
+            <a:bodyPr/>
+            <a:p/>
+          </p:txBody>
         </p:sp>
         <p:sp>
           <p:nvSpPr>
@@ -12807,6 +13147,10 @@
               </a:solidFill>
             </a:ln>
           </p:spPr>
+          <p:txBody>
+            <a:bodyPr/>
+            <a:p/>
+          </p:txBody>
         </p:sp>
         <p:sp>
           <p:nvSpPr>
@@ -13048,6 +13392,10 @@
               </a:solidFill>
             </a:ln>
           </p:spPr>
+          <p:txBody>
+            <a:bodyPr/>
+            <a:p/>
+          </p:txBody>
         </p:sp>
         <p:sp>
           <p:nvSpPr>
@@ -13347,6 +13695,10 @@
             <a:noFill/>
           </a:ln>
         </p:spPr>
+        <p:txBody>
+          <a:bodyPr/>
+          <a:p/>
+        </p:txBody>
       </p:sp>
       <p:sp>
         <p:nvSpPr>
@@ -13380,6 +13732,10 @@
             <a:noFill/>
           </a:ln>
         </p:spPr>
+        <p:txBody>
+          <a:bodyPr/>
+          <a:p/>
+        </p:txBody>
       </p:sp>
       <p:sp>
         <p:nvSpPr>
@@ -13413,6 +13769,10 @@
             <a:noFill/>
           </a:ln>
         </p:spPr>
+        <p:txBody>
+          <a:bodyPr/>
+          <a:p/>
+        </p:txBody>
       </p:sp>
       <p:sp>
         <p:nvSpPr>
@@ -13566,6 +13926,10 @@
             <a:noFill/>
           </a:ln>
         </p:spPr>
+        <p:txBody>
+          <a:bodyPr/>
+          <a:p/>
+        </p:txBody>
       </p:sp>
       <p:grpSp>
         <p:nvGrpSpPr>
@@ -13606,6 +13970,10 @@
               </a:solidFill>
             </a:ln>
           </p:spPr>
+          <p:txBody>
+            <a:bodyPr/>
+            <a:p/>
+          </p:txBody>
         </p:sp>
         <p:sp>
           <p:nvSpPr>
@@ -13807,6 +14175,10 @@
               </a:solidFill>
             </a:ln>
           </p:spPr>
+          <p:txBody>
+            <a:bodyPr/>
+            <a:p/>
+          </p:txBody>
         </p:sp>
         <p:sp>
           <p:nvSpPr>
@@ -14008,6 +14380,10 @@
               </a:solidFill>
             </a:ln>
           </p:spPr>
+          <p:txBody>
+            <a:bodyPr/>
+            <a:p/>
+          </p:txBody>
         </p:sp>
         <p:sp>
           <p:nvSpPr>
@@ -14209,6 +14585,10 @@
               </a:solidFill>
             </a:ln>
           </p:spPr>
+          <p:txBody>
+            <a:bodyPr/>
+            <a:p/>
+          </p:txBody>
         </p:sp>
         <p:sp>
           <p:nvSpPr>
@@ -14410,6 +14790,10 @@
               </a:solidFill>
             </a:ln>
           </p:spPr>
+          <p:txBody>
+            <a:bodyPr/>
+            <a:p/>
+          </p:txBody>
         </p:sp>
         <p:sp>
           <p:nvSpPr>
@@ -14571,6 +14955,10 @@
               </a:solidFill>
             </a:ln>
           </p:spPr>
+          <p:txBody>
+            <a:bodyPr/>
+            <a:p/>
+          </p:txBody>
         </p:sp>
         <p:sp>
           <p:nvSpPr>
@@ -14790,6 +15178,10 @@
             <a:noFill/>
           </a:ln>
         </p:spPr>
+        <p:txBody>
+          <a:bodyPr/>
+          <a:p/>
+        </p:txBody>
       </p:sp>
       <p:sp>
         <p:nvSpPr>
@@ -14823,6 +15215,10 @@
             <a:noFill/>
           </a:ln>
         </p:spPr>
+        <p:txBody>
+          <a:bodyPr/>
+          <a:p/>
+        </p:txBody>
       </p:sp>
       <p:sp>
         <p:nvSpPr>
@@ -14856,6 +15252,10 @@
             <a:noFill/>
           </a:ln>
         </p:spPr>
+        <p:txBody>
+          <a:bodyPr/>
+          <a:p/>
+        </p:txBody>
       </p:sp>
       <p:sp>
         <p:nvSpPr>
@@ -15009,6 +15409,10 @@
             <a:noFill/>
           </a:ln>
         </p:spPr>
+        <p:txBody>
+          <a:bodyPr/>
+          <a:p/>
+        </p:txBody>
       </p:sp>
       <p:sp>
         <p:nvSpPr>
@@ -15169,6 +15573,10 @@
               </a:solidFill>
             </a:ln>
           </p:spPr>
+          <p:txBody>
+            <a:bodyPr/>
+            <a:p/>
+          </p:txBody>
         </p:sp>
         <p:sp>
           <p:nvSpPr>
@@ -15410,6 +15818,10 @@
               </a:solidFill>
             </a:ln>
           </p:spPr>
+          <p:txBody>
+            <a:bodyPr/>
+            <a:p/>
+          </p:txBody>
         </p:sp>
         <p:sp>
           <p:nvSpPr>
@@ -15651,6 +16063,10 @@
               </a:solidFill>
             </a:ln>
           </p:spPr>
+          <p:txBody>
+            <a:bodyPr/>
+            <a:p/>
+          </p:txBody>
         </p:sp>
         <p:sp>
           <p:nvSpPr>
@@ -15852,6 +16268,10 @@
               </a:solidFill>
             </a:ln>
           </p:spPr>
+          <p:txBody>
+            <a:bodyPr/>
+            <a:p/>
+          </p:txBody>
         </p:sp>
         <p:sp>
           <p:nvSpPr>
@@ -15928,7 +16348,7 @@
                   <a:ea typeface="Inter"/>
                   <a:cs typeface="Inter"/>
                 </a:rPr>
-                <a:t>Без MCP все цитаты — [модель знания — провер]</a:t>
+                <a:t>Без MCP все цитаты — [model knowledge — verify]</a:t>
               </a:r>
             </a:p>
           </p:txBody>
@@ -16071,6 +16491,10 @@
             <a:noFill/>
           </a:ln>
         </p:spPr>
+        <p:txBody>
+          <a:bodyPr/>
+          <a:p/>
+        </p:txBody>
       </p:sp>
       <p:sp>
         <p:nvSpPr>
@@ -16104,6 +16528,10 @@
             <a:noFill/>
           </a:ln>
         </p:spPr>
+        <p:txBody>
+          <a:bodyPr/>
+          <a:p/>
+        </p:txBody>
       </p:sp>
       <p:sp>
         <p:nvSpPr>
@@ -16137,6 +16565,10 @@
             <a:noFill/>
           </a:ln>
         </p:spPr>
+        <p:txBody>
+          <a:bodyPr/>
+          <a:p/>
+        </p:txBody>
       </p:sp>
       <p:sp>
         <p:nvSpPr>
@@ -16290,6 +16722,10 @@
             <a:noFill/>
           </a:ln>
         </p:spPr>
+        <p:txBody>
+          <a:bodyPr/>
+          <a:p/>
+        </p:txBody>
       </p:sp>
       <p:grpSp>
         <p:nvGrpSpPr>
@@ -16330,6 +16766,10 @@
               </a:solidFill>
             </a:ln>
           </p:spPr>
+          <p:txBody>
+            <a:bodyPr/>
+            <a:p/>
+          </p:txBody>
         </p:sp>
         <p:sp>
           <p:nvSpPr>
@@ -16451,6 +16891,10 @@
               </a:solidFill>
             </a:ln>
           </p:spPr>
+          <p:txBody>
+            <a:bodyPr/>
+            <a:p/>
+          </p:txBody>
         </p:sp>
         <p:sp>
           <p:nvSpPr>
@@ -16572,6 +17016,10 @@
               </a:solidFill>
             </a:ln>
           </p:spPr>
+          <p:txBody>
+            <a:bodyPr/>
+            <a:p/>
+          </p:txBody>
         </p:sp>
         <p:sp>
           <p:nvSpPr>
@@ -16693,6 +17141,10 @@
               </a:solidFill>
             </a:ln>
           </p:spPr>
+          <p:txBody>
+            <a:bodyPr/>
+            <a:p/>
+          </p:txBody>
         </p:sp>
         <p:sp>
           <p:nvSpPr>
@@ -16814,6 +17266,10 @@
               </a:solidFill>
             </a:ln>
           </p:spPr>
+          <p:txBody>
+            <a:bodyPr/>
+            <a:p/>
+          </p:txBody>
         </p:sp>
         <p:sp>
           <p:nvSpPr>
@@ -16935,6 +17391,10 @@
               </a:solidFill>
             </a:ln>
           </p:spPr>
+          <p:txBody>
+            <a:bodyPr/>
+            <a:p/>
+          </p:txBody>
         </p:sp>
         <p:sp>
           <p:nvSpPr>
@@ -17056,6 +17516,10 @@
               </a:solidFill>
             </a:ln>
           </p:spPr>
+          <p:txBody>
+            <a:bodyPr/>
+            <a:p/>
+          </p:txBody>
         </p:sp>
         <p:sp>
           <p:nvSpPr>
@@ -17177,6 +17641,10 @@
               </a:solidFill>
             </a:ln>
           </p:spPr>
+          <p:txBody>
+            <a:bodyPr/>
+            <a:p/>
+          </p:txBody>
         </p:sp>
         <p:sp>
           <p:nvSpPr>
